--- a/dist/salesbook-generator-internal-guide.pptx
+++ b/dist/salesbook-generator-internal-guide.pptx
@@ -19,9 +19,10 @@
     <p:sldId id="267" r:id="rId13"/>
     <p:sldId id="268" r:id="rId14"/>
     <p:sldId id="269" r:id="rId15"/>
+    <p:sldId id="270" r:id="rId16"/>
   </p:sldIdLst>
   <p:notesMasterIdLst>
-    <p:notesMasterId r:id="rId16"/>
+    <p:notesMasterId r:id="rId17"/>
   </p:notesMasterIdLst>
   <p:sldSz cx="12192000" cy="6858000"/>
   <p:notesSz cx="6858000" cy="12192000"/>
@@ -120,13 +121,13 @@
   <p:extLst>
     <p:ext uri="{521415D9-36F7-43E2-AB2F-B90AF26B5E84}">
       <p14:sectionLst xmlns:p14="http://schemas.microsoft.com/office/powerpoint/2010/main">
-        <p14:section name="시작" id="{52002c25-dfe0-2087-f91a-095509f526ee}">
+        <p14:section name="시작" id="{632ae994-9209-fb3c-3de2-0d60a2103c0c}">
           <p14:sldIdLst>
             <p14:sldId id="256"/>
             <p14:sldId id="257"/>
           </p14:sldIdLst>
         </p14:section>
-        <p14:section name="1부 사용 가이드" id="{69871807-ec82-e52a-2dc0-a74575c132f6}">
+        <p14:section name="1부 사용 가이드" id="{eb84edf3-92d2-3e61-74de-49a1184c230c}">
           <p14:sldIdLst>
             <p14:sldId id="258"/>
             <p14:sldId id="259"/>
@@ -137,17 +138,18 @@
             <p14:sldId id="264"/>
           </p14:sldIdLst>
         </p14:section>
-        <p14:section name="2부 기획 취지" id="{46b36d82-2db2-6ac8-1ce3-e4d69668746d}">
+        <p14:section name="2부 기획 취지" id="{a0fc9e11-1409-a2db-c8b7-2bd723a179a5}">
           <p14:sldIdLst>
             <p14:sldId id="265"/>
             <p14:sldId id="266"/>
             <p14:sldId id="267"/>
+            <p14:sldId id="268"/>
           </p14:sldIdLst>
         </p14:section>
-        <p14:section name="3부 자주 묻는 질문" id="{3b3f3a19-3cab-cbd4-d4e8-decef8820f3e}">
+        <p14:section name="3부 자주 묻는 질문" id="{5069f4b2-559c-261a-f5dc-9e515193dc9a}">
           <p14:sldIdLst>
-            <p14:sldId id="268"/>
             <p14:sldId id="269"/>
+            <p14:sldId id="270"/>
           </p14:sldIdLst>
         </p14:section>
       </p14:sectionLst>
@@ -1018,6 +1020,94 @@
             <a:fld id="{F7021451-1387-4CA6-816F-3879F97B5CBC}" type="slidenum">
               <a:rPr lang="en-US"/>
               <a:t>14</a:t>
+            </a:fld>
+            <a:endParaRPr lang="en-US"/>
+          </a:p>
+        </p:txBody>
+      </p:sp>
+    </p:spTree>
+    <p:extLst>
+      <p:ext uri="{BB962C8B-B14F-4D97-AF65-F5344CB8AC3E}">
+        <p14:creationId xmlns:p14="http://schemas.microsoft.com/office/powerpoint/2010/main" val="1024086991"/>
+      </p:ext>
+    </p:extLst>
+  </p:cSld>
+  <p:clrMapOvr>
+    <a:masterClrMapping/>
+  </p:clrMapOvr>
+</p:notes>
+</file>
+
+<file path=ppt/notesSlides/notesSlide15.xml><?xml version="1.0" encoding="utf-8"?>
+<p:notes xmlns:a="http://schemas.openxmlformats.org/drawingml/2006/main" xmlns:r="http://schemas.openxmlformats.org/officeDocument/2006/relationships" xmlns:p="http://schemas.openxmlformats.org/presentationml/2006/main">
+  <p:cSld>
+    <p:spTree>
+      <p:nvGrpSpPr>
+        <p:cNvPr id="1" name=""/>
+        <p:cNvGrpSpPr/>
+        <p:nvPr/>
+      </p:nvGrpSpPr>
+      <p:grpSpPr>
+        <a:xfrm>
+          <a:off x="0" y="0"/>
+          <a:ext cx="0" cy="0"/>
+          <a:chOff x="0" y="0"/>
+          <a:chExt cx="0" cy="0"/>
+        </a:xfrm>
+      </p:grpSpPr>
+      <p:sp>
+        <p:nvSpPr>
+          <p:cNvPr id="2" name="Slide Image Placeholder 1"/>
+          <p:cNvSpPr>
+            <a:spLocks noGrp="1" noRot="1" noChangeAspect="1"/>
+          </p:cNvSpPr>
+          <p:nvPr>
+            <p:ph type="sldImg"/>
+          </p:nvPr>
+        </p:nvSpPr>
+        <p:spPr/>
+      </p:sp>
+      <p:sp>
+        <p:nvSpPr>
+          <p:cNvPr id="3" name="Notes Placeholder 2"/>
+          <p:cNvSpPr>
+            <a:spLocks noGrp="1"/>
+          </p:cNvSpPr>
+          <p:nvPr>
+            <p:ph type="body" idx="1"/>
+          </p:nvPr>
+        </p:nvSpPr>
+        <p:spPr/>
+        <p:txBody>
+          <a:bodyPr/>
+          <a:lstStyle/>
+          <a:p>
+            <a:r>
+              <a:rPr lang="en-US" dirty="0"/>
+              <a:t/>
+            </a:r>
+            <a:endParaRPr lang="en-US" dirty="0"/>
+          </a:p>
+        </p:txBody>
+      </p:sp>
+      <p:sp>
+        <p:nvSpPr>
+          <p:cNvPr id="4" name="Slide Number Placeholder 3"/>
+          <p:cNvSpPr>
+            <a:spLocks noGrp="1"/>
+          </p:cNvSpPr>
+          <p:nvPr>
+            <p:ph type="sldNum" sz="quarter" idx="10"/>
+          </p:nvPr>
+        </p:nvSpPr>
+        <p:spPr/>
+        <p:txBody>
+          <a:bodyPr/>
+          <a:lstStyle/>
+          <a:p>
+            <a:fld id="{F7021451-1387-4CA6-816F-3879F97B5CBC}" type="slidenum">
+              <a:rPr lang="en-US"/>
+              <a:t>15</a:t>
             </a:fld>
             <a:endParaRPr lang="en-US"/>
           </a:p>
@@ -6150,15 +6240,1330 @@
                   <a:srgbClr val="191F28"/>
                 </a:solidFill>
               </a:rPr>
-              <a:t>11. 자주 묻는 질문</a:t>
+              <a:t>11. 제언 — MeAI 리포트 생성과 잇기</a:t>
             </a:r>
             <a:endParaRPr lang="en-US" sz="2400" dirty="0"/>
           </a:p>
         </p:txBody>
       </p:sp>
+      <p:sp>
+        <p:nvSpPr>
+          <p:cNvPr id="3" name="Text 0"/>
+          <p:cNvSpPr/>
+          <p:nvPr>
+            <p:ph idx="101" type="body" hasCustomPrompt="1"/>
+          </p:nvPr>
+        </p:nvSpPr>
+        <p:spPr>
+          <a:xfrm>
+            <a:off x="640080" y="987552"/>
+            <a:ext cx="10911535" cy="411480"/>
+          </a:xfrm>
+          <a:prstGeom prst="rect">
+            <a:avLst/>
+          </a:prstGeom>
+          <a:noFill/>
+          <a:ln/>
+        </p:spPr>
+        <p:txBody>
+          <a:bodyPr wrap="square" lIns="0" tIns="0" rIns="0" bIns="0" rtlCol="0" anchor="t"/>
+          <a:lstStyle/>
+          <a:p>
+            <a:pPr algn="l" indent="0" marL="0">
+              <a:buNone/>
+            </a:pPr>
+            <a:r>
+              <a:rPr lang="en-US" sz="1300" dirty="0">
+                <a:solidFill>
+                  <a:srgbClr val="4E5968"/>
+                </a:solidFill>
+              </a:rPr>
+              <a:t>이 생성기는 MeAI 고도화를 위한 선행 과제입니다. 여기서 만든 것을 MeAI 리포트의 재료로 넘기는 방안을 제안합니다</a:t>
+            </a:r>
+            <a:endParaRPr lang="en-US" sz="1300" dirty="0"/>
+          </a:p>
+        </p:txBody>
+      </p:sp>
       <p:graphicFrame>
         <p:nvGraphicFramePr>
           <p:cNvPr id="14" name="tbl-129"/>
+          <p:cNvGraphicFramePr>
+            <a:graphicFrameLocks noGrp="1"/>
+          </p:cNvGraphicFramePr>
+          <p:nvPr>
+            <p:extLst>
+              <p:ext uri="{D42A27DB-BD31-4B8C-83A1-F6EECF244321}">
+                <p14:modId xmlns:p14="http://schemas.microsoft.com/office/powerpoint/2010/main" val="1579011935"/>
+              </p:ext>
+            </p:extLst>
+          </p:nvPr>
+        </p:nvGraphicFramePr>
+        <p:xfrm>
+          <a:off x="640080" y="1600200"/>
+          <a:ext cx="10881360" cy="914400"/>
+        </p:xfrm>
+        <a:graphic>
+          <a:graphicData uri="http://schemas.openxmlformats.org/drawingml/2006/table">
+            <a:tbl>
+              <a:tblPr/>
+              <a:tblGrid>
+                <a:gridCol w="3566160"/>
+                <a:gridCol w="3657600"/>
+                <a:gridCol w="3657600"/>
+              </a:tblGrid>
+              <a:tr h="0">
+                <a:tc>
+                  <a:txBody>
+                    <a:bodyPr/>
+                    <a:lstStyle/>
+                    <a:p>
+                      <a:pPr indent="0" marL="0">
+                        <a:buNone/>
+                      </a:pPr>
+                      <a:r>
+                        <a:rPr lang="en-US" sz="1050" b="1" dirty="0">
+                          <a:solidFill>
+                            <a:srgbClr val="191F28"/>
+                          </a:solidFill>
+                          <a:latin typeface="Malgun Gothic" pitchFamily="34" charset="0"/>
+                          <a:ea typeface="Malgun Gothic" pitchFamily="34" charset="-122"/>
+                          <a:cs typeface="Malgun Gothic" pitchFamily="34" charset="-120"/>
+                        </a:rPr>
+                        <a:t>MeAI 가 설계 리포트를 쓸 때 막히는 곳</a:t>
+                      </a:r>
+                      <a:endParaRPr lang="en-US" sz="1050" dirty="0">
+                        <a:latin typeface="Malgun Gothic" charset="0"/>
+                        <a:ea typeface="Malgun Gothic" charset="0"/>
+                        <a:cs typeface="Malgun Gothic" charset="0"/>
+                      </a:endParaRPr>
+                    </a:p>
+                  </a:txBody>
+                  <a:tcPr marL="54864" marR="54864" marT="54864" marB="54864" anchor="ctr">
+                    <a:lnL w="9525" cap="flat" cmpd="sng" algn="ctr">
+                      <a:solidFill>
+                        <a:srgbClr val="E5E8EB"/>
+                      </a:solidFill>
+                      <a:prstDash val="solid"/>
+                      <a:round/>
+                      <a:headEnd type="none" w="med" len="med"/>
+                      <a:tailEnd type="none" w="med" len="med"/>
+                    </a:lnL>
+                    <a:lnR w="9525" cap="flat" cmpd="sng" algn="ctr">
+                      <a:solidFill>
+                        <a:srgbClr val="E5E8EB"/>
+                      </a:solidFill>
+                      <a:prstDash val="solid"/>
+                      <a:round/>
+                      <a:headEnd type="none" w="med" len="med"/>
+                      <a:tailEnd type="none" w="med" len="med"/>
+                    </a:lnR>
+                    <a:lnT w="9525" cap="flat" cmpd="sng" algn="ctr">
+                      <a:solidFill>
+                        <a:srgbClr val="E5E8EB"/>
+                      </a:solidFill>
+                      <a:prstDash val="solid"/>
+                      <a:round/>
+                      <a:headEnd type="none" w="med" len="med"/>
+                      <a:tailEnd type="none" w="med" len="med"/>
+                    </a:lnT>
+                    <a:lnB w="9525" cap="flat" cmpd="sng" algn="ctr">
+                      <a:solidFill>
+                        <a:srgbClr val="E5E8EB"/>
+                      </a:solidFill>
+                      <a:prstDash val="solid"/>
+                      <a:round/>
+                      <a:headEnd type="none" w="med" len="med"/>
+                      <a:tailEnd type="none" w="med" len="med"/>
+                    </a:lnB>
+                    <a:solidFill>
+                      <a:srgbClr val="F4F5F7"/>
+                    </a:solidFill>
+                  </a:tcPr>
+                </a:tc>
+                <a:tc>
+                  <a:txBody>
+                    <a:bodyPr/>
+                    <a:lstStyle/>
+                    <a:p>
+                      <a:pPr indent="0" marL="0">
+                        <a:buNone/>
+                      </a:pPr>
+                      <a:r>
+                        <a:rPr lang="en-US" sz="1050" b="1" dirty="0">
+                          <a:solidFill>
+                            <a:srgbClr val="191F28"/>
+                          </a:solidFill>
+                          <a:latin typeface="Malgun Gothic" pitchFamily="34" charset="0"/>
+                          <a:ea typeface="Malgun Gothic" pitchFamily="34" charset="-122"/>
+                          <a:cs typeface="Malgun Gothic" pitchFamily="34" charset="-120"/>
+                        </a:rPr>
+                        <a:t>생성기가 이미 가진 것</a:t>
+                      </a:r>
+                      <a:endParaRPr lang="en-US" sz="1050" dirty="0">
+                        <a:latin typeface="Malgun Gothic" charset="0"/>
+                        <a:ea typeface="Malgun Gothic" charset="0"/>
+                        <a:cs typeface="Malgun Gothic" charset="0"/>
+                      </a:endParaRPr>
+                    </a:p>
+                  </a:txBody>
+                  <a:tcPr marL="54864" marR="54864" marT="54864" marB="54864" anchor="ctr">
+                    <a:lnL w="9525" cap="flat" cmpd="sng" algn="ctr">
+                      <a:solidFill>
+                        <a:srgbClr val="E5E8EB"/>
+                      </a:solidFill>
+                      <a:prstDash val="solid"/>
+                      <a:round/>
+                      <a:headEnd type="none" w="med" len="med"/>
+                      <a:tailEnd type="none" w="med" len="med"/>
+                    </a:lnL>
+                    <a:lnR w="9525" cap="flat" cmpd="sng" algn="ctr">
+                      <a:solidFill>
+                        <a:srgbClr val="E5E8EB"/>
+                      </a:solidFill>
+                      <a:prstDash val="solid"/>
+                      <a:round/>
+                      <a:headEnd type="none" w="med" len="med"/>
+                      <a:tailEnd type="none" w="med" len="med"/>
+                    </a:lnR>
+                    <a:lnT w="9525" cap="flat" cmpd="sng" algn="ctr">
+                      <a:solidFill>
+                        <a:srgbClr val="E5E8EB"/>
+                      </a:solidFill>
+                      <a:prstDash val="solid"/>
+                      <a:round/>
+                      <a:headEnd type="none" w="med" len="med"/>
+                      <a:tailEnd type="none" w="med" len="med"/>
+                    </a:lnT>
+                    <a:lnB w="9525" cap="flat" cmpd="sng" algn="ctr">
+                      <a:solidFill>
+                        <a:srgbClr val="E5E8EB"/>
+                      </a:solidFill>
+                      <a:prstDash val="solid"/>
+                      <a:round/>
+                      <a:headEnd type="none" w="med" len="med"/>
+                      <a:tailEnd type="none" w="med" len="med"/>
+                    </a:lnB>
+                    <a:solidFill>
+                      <a:srgbClr val="F4F5F7"/>
+                    </a:solidFill>
+                  </a:tcPr>
+                </a:tc>
+                <a:tc>
+                  <a:txBody>
+                    <a:bodyPr/>
+                    <a:lstStyle/>
+                    <a:p>
+                      <a:pPr indent="0" marL="0">
+                        <a:buNone/>
+                      </a:pPr>
+                      <a:r>
+                        <a:rPr lang="en-US" sz="1050" b="1" dirty="0">
+                          <a:solidFill>
+                            <a:srgbClr val="191F28"/>
+                          </a:solidFill>
+                          <a:latin typeface="Malgun Gothic" pitchFamily="34" charset="0"/>
+                          <a:ea typeface="Malgun Gothic" pitchFamily="34" charset="-122"/>
+                          <a:cs typeface="Malgun Gothic" pitchFamily="34" charset="-120"/>
+                        </a:rPr>
+                        <a:t>잇는 방법(제언)</a:t>
+                      </a:r>
+                      <a:endParaRPr lang="en-US" sz="1050" dirty="0">
+                        <a:latin typeface="Malgun Gothic" charset="0"/>
+                        <a:ea typeface="Malgun Gothic" charset="0"/>
+                        <a:cs typeface="Malgun Gothic" charset="0"/>
+                      </a:endParaRPr>
+                    </a:p>
+                  </a:txBody>
+                  <a:tcPr marL="54864" marR="54864" marT="54864" marB="54864" anchor="ctr">
+                    <a:lnL w="9525" cap="flat" cmpd="sng" algn="ctr">
+                      <a:solidFill>
+                        <a:srgbClr val="E5E8EB"/>
+                      </a:solidFill>
+                      <a:prstDash val="solid"/>
+                      <a:round/>
+                      <a:headEnd type="none" w="med" len="med"/>
+                      <a:tailEnd type="none" w="med" len="med"/>
+                    </a:lnL>
+                    <a:lnR w="9525" cap="flat" cmpd="sng" algn="ctr">
+                      <a:solidFill>
+                        <a:srgbClr val="E5E8EB"/>
+                      </a:solidFill>
+                      <a:prstDash val="solid"/>
+                      <a:round/>
+                      <a:headEnd type="none" w="med" len="med"/>
+                      <a:tailEnd type="none" w="med" len="med"/>
+                    </a:lnR>
+                    <a:lnT w="9525" cap="flat" cmpd="sng" algn="ctr">
+                      <a:solidFill>
+                        <a:srgbClr val="E5E8EB"/>
+                      </a:solidFill>
+                      <a:prstDash val="solid"/>
+                      <a:round/>
+                      <a:headEnd type="none" w="med" len="med"/>
+                      <a:tailEnd type="none" w="med" len="med"/>
+                    </a:lnT>
+                    <a:lnB w="9525" cap="flat" cmpd="sng" algn="ctr">
+                      <a:solidFill>
+                        <a:srgbClr val="E5E8EB"/>
+                      </a:solidFill>
+                      <a:prstDash val="solid"/>
+                      <a:round/>
+                      <a:headEnd type="none" w="med" len="med"/>
+                      <a:tailEnd type="none" w="med" len="med"/>
+                    </a:lnB>
+                    <a:solidFill>
+                      <a:srgbClr val="F4F5F7"/>
+                    </a:solidFill>
+                  </a:tcPr>
+                </a:tc>
+              </a:tr>
+              <a:tr h="0">
+                <a:tc>
+                  <a:txBody>
+                    <a:bodyPr/>
+                    <a:lstStyle/>
+                    <a:p>
+                      <a:pPr indent="0" marL="0">
+                        <a:buNone/>
+                      </a:pPr>
+                      <a:r>
+                        <a:rPr lang="en-US" sz="1050" dirty="0">
+                          <a:solidFill>
+                            <a:srgbClr val="4E5968"/>
+                          </a:solidFill>
+                          <a:latin typeface="Malgun Gothic" pitchFamily="34" charset="0"/>
+                          <a:ea typeface="Malgun Gothic" pitchFamily="34" charset="-122"/>
+                          <a:cs typeface="Malgun Gothic" pitchFamily="34" charset="-120"/>
+                        </a:rPr>
+                        <a:t>근거 — 담보가 어느 질병코드를 보장하는지 모르면 그럴듯한 추정이 섞인다</a:t>
+                      </a:r>
+                      <a:endParaRPr lang="en-US" sz="1050" dirty="0">
+                        <a:latin typeface="Malgun Gothic" charset="0"/>
+                        <a:ea typeface="Malgun Gothic" charset="0"/>
+                        <a:cs typeface="Malgun Gothic" charset="0"/>
+                      </a:endParaRPr>
+                    </a:p>
+                  </a:txBody>
+                  <a:tcPr marL="54864" marR="54864" marT="54864" marB="54864" anchor="ctr">
+                    <a:lnL w="9525" cap="flat" cmpd="sng" algn="ctr">
+                      <a:solidFill>
+                        <a:srgbClr val="E5E8EB"/>
+                      </a:solidFill>
+                      <a:prstDash val="solid"/>
+                      <a:round/>
+                      <a:headEnd type="none" w="med" len="med"/>
+                      <a:tailEnd type="none" w="med" len="med"/>
+                    </a:lnL>
+                    <a:lnR w="9525" cap="flat" cmpd="sng" algn="ctr">
+                      <a:solidFill>
+                        <a:srgbClr val="E5E8EB"/>
+                      </a:solidFill>
+                      <a:prstDash val="solid"/>
+                      <a:round/>
+                      <a:headEnd type="none" w="med" len="med"/>
+                      <a:tailEnd type="none" w="med" len="med"/>
+                    </a:lnR>
+                    <a:lnT w="9525" cap="flat" cmpd="sng" algn="ctr">
+                      <a:solidFill>
+                        <a:srgbClr val="E5E8EB"/>
+                      </a:solidFill>
+                      <a:prstDash val="solid"/>
+                      <a:round/>
+                      <a:headEnd type="none" w="med" len="med"/>
+                      <a:tailEnd type="none" w="med" len="med"/>
+                    </a:lnT>
+                    <a:lnB w="9525" cap="flat" cmpd="sng" algn="ctr">
+                      <a:solidFill>
+                        <a:srgbClr val="E5E8EB"/>
+                      </a:solidFill>
+                      <a:prstDash val="solid"/>
+                      <a:round/>
+                      <a:headEnd type="none" w="med" len="med"/>
+                      <a:tailEnd type="none" w="med" len="med"/>
+                    </a:lnB>
+                  </a:tcPr>
+                </a:tc>
+                <a:tc>
+                  <a:txBody>
+                    <a:bodyPr/>
+                    <a:lstStyle/>
+                    <a:p>
+                      <a:pPr indent="0" marL="0">
+                        <a:buNone/>
+                      </a:pPr>
+                      <a:r>
+                        <a:rPr lang="en-US" sz="1050" dirty="0">
+                          <a:solidFill>
+                            <a:srgbClr val="4E5968"/>
+                          </a:solidFill>
+                          <a:latin typeface="Malgun Gothic" pitchFamily="34" charset="0"/>
+                          <a:ea typeface="Malgun Gothic" pitchFamily="34" charset="-122"/>
+                          <a:cs typeface="Malgun Gothic" pitchFamily="34" charset="-120"/>
+                        </a:rPr>
+                        <a:t>특약 마스터 4,338건(약관 별표 질병코드 · 제외코드 · 수가코드) · Key Point 36 · 용어 17</a:t>
+                      </a:r>
+                      <a:endParaRPr lang="en-US" sz="1050" dirty="0">
+                        <a:latin typeface="Malgun Gothic" charset="0"/>
+                        <a:ea typeface="Malgun Gothic" charset="0"/>
+                        <a:cs typeface="Malgun Gothic" charset="0"/>
+                      </a:endParaRPr>
+                    </a:p>
+                  </a:txBody>
+                  <a:tcPr marL="54864" marR="54864" marT="54864" marB="54864" anchor="ctr">
+                    <a:lnL w="9525" cap="flat" cmpd="sng" algn="ctr">
+                      <a:solidFill>
+                        <a:srgbClr val="E5E8EB"/>
+                      </a:solidFill>
+                      <a:prstDash val="solid"/>
+                      <a:round/>
+                      <a:headEnd type="none" w="med" len="med"/>
+                      <a:tailEnd type="none" w="med" len="med"/>
+                    </a:lnL>
+                    <a:lnR w="9525" cap="flat" cmpd="sng" algn="ctr">
+                      <a:solidFill>
+                        <a:srgbClr val="E5E8EB"/>
+                      </a:solidFill>
+                      <a:prstDash val="solid"/>
+                      <a:round/>
+                      <a:headEnd type="none" w="med" len="med"/>
+                      <a:tailEnd type="none" w="med" len="med"/>
+                    </a:lnR>
+                    <a:lnT w="9525" cap="flat" cmpd="sng" algn="ctr">
+                      <a:solidFill>
+                        <a:srgbClr val="E5E8EB"/>
+                      </a:solidFill>
+                      <a:prstDash val="solid"/>
+                      <a:round/>
+                      <a:headEnd type="none" w="med" len="med"/>
+                      <a:tailEnd type="none" w="med" len="med"/>
+                    </a:lnT>
+                    <a:lnB w="9525" cap="flat" cmpd="sng" algn="ctr">
+                      <a:solidFill>
+                        <a:srgbClr val="E5E8EB"/>
+                      </a:solidFill>
+                      <a:prstDash val="solid"/>
+                      <a:round/>
+                      <a:headEnd type="none" w="med" len="med"/>
+                      <a:tailEnd type="none" w="med" len="med"/>
+                    </a:lnB>
+                  </a:tcPr>
+                </a:tc>
+                <a:tc>
+                  <a:txBody>
+                    <a:bodyPr/>
+                    <a:lstStyle/>
+                    <a:p>
+                      <a:pPr indent="0" marL="0">
+                        <a:buNone/>
+                      </a:pPr>
+                      <a:r>
+                        <a:rPr lang="en-US" sz="1050" dirty="0">
+                          <a:solidFill>
+                            <a:srgbClr val="4E5968"/>
+                          </a:solidFill>
+                          <a:latin typeface="Malgun Gothic" pitchFamily="34" charset="0"/>
+                          <a:ea typeface="Malgun Gothic" pitchFamily="34" charset="-122"/>
+                          <a:cs typeface="Malgun Gothic" pitchFamily="34" charset="-120"/>
+                        </a:rPr>
+                        <a:t>마스터와 창고를 MeAI 지식 자료로 연결해 리포트 문장마다 「약관 별표 ○○」 근거가 붙게 한다</a:t>
+                      </a:r>
+                      <a:endParaRPr lang="en-US" sz="1050" dirty="0">
+                        <a:latin typeface="Malgun Gothic" charset="0"/>
+                        <a:ea typeface="Malgun Gothic" charset="0"/>
+                        <a:cs typeface="Malgun Gothic" charset="0"/>
+                      </a:endParaRPr>
+                    </a:p>
+                  </a:txBody>
+                  <a:tcPr marL="54864" marR="54864" marT="54864" marB="54864" anchor="ctr">
+                    <a:lnL w="9525" cap="flat" cmpd="sng" algn="ctr">
+                      <a:solidFill>
+                        <a:srgbClr val="E5E8EB"/>
+                      </a:solidFill>
+                      <a:prstDash val="solid"/>
+                      <a:round/>
+                      <a:headEnd type="none" w="med" len="med"/>
+                      <a:tailEnd type="none" w="med" len="med"/>
+                    </a:lnL>
+                    <a:lnR w="9525" cap="flat" cmpd="sng" algn="ctr">
+                      <a:solidFill>
+                        <a:srgbClr val="E5E8EB"/>
+                      </a:solidFill>
+                      <a:prstDash val="solid"/>
+                      <a:round/>
+                      <a:headEnd type="none" w="med" len="med"/>
+                      <a:tailEnd type="none" w="med" len="med"/>
+                    </a:lnR>
+                    <a:lnT w="9525" cap="flat" cmpd="sng" algn="ctr">
+                      <a:solidFill>
+                        <a:srgbClr val="E5E8EB"/>
+                      </a:solidFill>
+                      <a:prstDash val="solid"/>
+                      <a:round/>
+                      <a:headEnd type="none" w="med" len="med"/>
+                      <a:tailEnd type="none" w="med" len="med"/>
+                    </a:lnT>
+                    <a:lnB w="9525" cap="flat" cmpd="sng" algn="ctr">
+                      <a:solidFill>
+                        <a:srgbClr val="E5E8EB"/>
+                      </a:solidFill>
+                      <a:prstDash val="solid"/>
+                      <a:round/>
+                      <a:headEnd type="none" w="med" len="med"/>
+                      <a:tailEnd type="none" w="med" len="med"/>
+                    </a:lnB>
+                  </a:tcPr>
+                </a:tc>
+              </a:tr>
+              <a:tr h="0">
+                <a:tc>
+                  <a:txBody>
+                    <a:bodyPr/>
+                    <a:lstStyle/>
+                    <a:p>
+                      <a:pPr indent="0" marL="0">
+                        <a:buNone/>
+                      </a:pPr>
+                      <a:r>
+                        <a:rPr lang="en-US" sz="1050" dirty="0">
+                          <a:solidFill>
+                            <a:srgbClr val="4E5968"/>
+                          </a:solidFill>
+                          <a:latin typeface="Malgun Gothic" pitchFamily="34" charset="0"/>
+                          <a:ea typeface="Malgun Gothic" pitchFamily="34" charset="-122"/>
+                          <a:cs typeface="Malgun Gothic" pitchFamily="34" charset="-120"/>
+                        </a:rPr>
+                        <a:t>입력 — 설계서 PDF 를 그대로 주면 담보 · 금액 · 설명문이 섞여 구조를 잃는다</a:t>
+                      </a:r>
+                      <a:endParaRPr lang="en-US" sz="1050" dirty="0">
+                        <a:latin typeface="Malgun Gothic" charset="0"/>
+                        <a:ea typeface="Malgun Gothic" charset="0"/>
+                        <a:cs typeface="Malgun Gothic" charset="0"/>
+                      </a:endParaRPr>
+                    </a:p>
+                  </a:txBody>
+                  <a:tcPr marL="54864" marR="54864" marT="54864" marB="54864" anchor="ctr">
+                    <a:lnL w="9525" cap="flat" cmpd="sng" algn="ctr">
+                      <a:solidFill>
+                        <a:srgbClr val="E5E8EB"/>
+                      </a:solidFill>
+                      <a:prstDash val="solid"/>
+                      <a:round/>
+                      <a:headEnd type="none" w="med" len="med"/>
+                      <a:tailEnd type="none" w="med" len="med"/>
+                    </a:lnL>
+                    <a:lnR w="9525" cap="flat" cmpd="sng" algn="ctr">
+                      <a:solidFill>
+                        <a:srgbClr val="E5E8EB"/>
+                      </a:solidFill>
+                      <a:prstDash val="solid"/>
+                      <a:round/>
+                      <a:headEnd type="none" w="med" len="med"/>
+                      <a:tailEnd type="none" w="med" len="med"/>
+                    </a:lnR>
+                    <a:lnT w="9525" cap="flat" cmpd="sng" algn="ctr">
+                      <a:solidFill>
+                        <a:srgbClr val="E5E8EB"/>
+                      </a:solidFill>
+                      <a:prstDash val="solid"/>
+                      <a:round/>
+                      <a:headEnd type="none" w="med" len="med"/>
+                      <a:tailEnd type="none" w="med" len="med"/>
+                    </a:lnT>
+                    <a:lnB w="9525" cap="flat" cmpd="sng" algn="ctr">
+                      <a:solidFill>
+                        <a:srgbClr val="E5E8EB"/>
+                      </a:solidFill>
+                      <a:prstDash val="solid"/>
+                      <a:round/>
+                      <a:headEnd type="none" w="med" len="med"/>
+                      <a:tailEnd type="none" w="med" len="med"/>
+                    </a:lnB>
+                  </a:tcPr>
+                </a:tc>
+                <a:tc>
+                  <a:txBody>
+                    <a:bodyPr/>
+                    <a:lstStyle/>
+                    <a:p>
+                      <a:pPr indent="0" marL="0">
+                        <a:buNone/>
+                      </a:pPr>
+                      <a:r>
+                        <a:rPr lang="en-US" sz="1050" dirty="0">
+                          <a:solidFill>
+                            <a:srgbClr val="4E5968"/>
+                          </a:solidFill>
+                          <a:latin typeface="Malgun Gothic" pitchFamily="34" charset="0"/>
+                          <a:ea typeface="Malgun Gothic" pitchFamily="34" charset="-122"/>
+                          <a:cs typeface="Malgun Gothic" pitchFamily="34" charset="-120"/>
+                        </a:rPr>
+                        <a:t>설계서 읽기(담보 · 금액 · 설명문) · 5갈래 분류 · 면책 · 감액 조건 추출</a:t>
+                      </a:r>
+                      <a:endParaRPr lang="en-US" sz="1050" dirty="0">
+                        <a:latin typeface="Malgun Gothic" charset="0"/>
+                        <a:ea typeface="Malgun Gothic" charset="0"/>
+                        <a:cs typeface="Malgun Gothic" charset="0"/>
+                      </a:endParaRPr>
+                    </a:p>
+                  </a:txBody>
+                  <a:tcPr marL="54864" marR="54864" marT="54864" marB="54864" anchor="ctr">
+                    <a:lnL w="9525" cap="flat" cmpd="sng" algn="ctr">
+                      <a:solidFill>
+                        <a:srgbClr val="E5E8EB"/>
+                      </a:solidFill>
+                      <a:prstDash val="solid"/>
+                      <a:round/>
+                      <a:headEnd type="none" w="med" len="med"/>
+                      <a:tailEnd type="none" w="med" len="med"/>
+                    </a:lnL>
+                    <a:lnR w="9525" cap="flat" cmpd="sng" algn="ctr">
+                      <a:solidFill>
+                        <a:srgbClr val="E5E8EB"/>
+                      </a:solidFill>
+                      <a:prstDash val="solid"/>
+                      <a:round/>
+                      <a:headEnd type="none" w="med" len="med"/>
+                      <a:tailEnd type="none" w="med" len="med"/>
+                    </a:lnR>
+                    <a:lnT w="9525" cap="flat" cmpd="sng" algn="ctr">
+                      <a:solidFill>
+                        <a:srgbClr val="E5E8EB"/>
+                      </a:solidFill>
+                      <a:prstDash val="solid"/>
+                      <a:round/>
+                      <a:headEnd type="none" w="med" len="med"/>
+                      <a:tailEnd type="none" w="med" len="med"/>
+                    </a:lnT>
+                    <a:lnB w="9525" cap="flat" cmpd="sng" algn="ctr">
+                      <a:solidFill>
+                        <a:srgbClr val="E5E8EB"/>
+                      </a:solidFill>
+                      <a:prstDash val="solid"/>
+                      <a:round/>
+                      <a:headEnd type="none" w="med" len="med"/>
+                      <a:tailEnd type="none" w="med" len="med"/>
+                    </a:lnB>
+                  </a:tcPr>
+                </a:tc>
+                <a:tc>
+                  <a:txBody>
+                    <a:bodyPr/>
+                    <a:lstStyle/>
+                    <a:p>
+                      <a:pPr indent="0" marL="0">
+                        <a:buNone/>
+                      </a:pPr>
+                      <a:r>
+                        <a:rPr lang="en-US" sz="1050" dirty="0">
+                          <a:solidFill>
+                            <a:srgbClr val="4E5968"/>
+                          </a:solidFill>
+                          <a:latin typeface="Malgun Gothic" pitchFamily="34" charset="0"/>
+                          <a:ea typeface="Malgun Gothic" pitchFamily="34" charset="-122"/>
+                          <a:cs typeface="Malgun Gothic" pitchFamily="34" charset="-120"/>
+                        </a:rPr>
+                        <a:t>생성기가 만든 구조 데이터를 MeAI 입력으로 넘기고, MeAI 는 고객 맞춤 서술만 맡는다</a:t>
+                      </a:r>
+                      <a:endParaRPr lang="en-US" sz="1050" dirty="0">
+                        <a:latin typeface="Malgun Gothic" charset="0"/>
+                        <a:ea typeface="Malgun Gothic" charset="0"/>
+                        <a:cs typeface="Malgun Gothic" charset="0"/>
+                      </a:endParaRPr>
+                    </a:p>
+                  </a:txBody>
+                  <a:tcPr marL="54864" marR="54864" marT="54864" marB="54864" anchor="ctr">
+                    <a:lnL w="9525" cap="flat" cmpd="sng" algn="ctr">
+                      <a:solidFill>
+                        <a:srgbClr val="E5E8EB"/>
+                      </a:solidFill>
+                      <a:prstDash val="solid"/>
+                      <a:round/>
+                      <a:headEnd type="none" w="med" len="med"/>
+                      <a:tailEnd type="none" w="med" len="med"/>
+                    </a:lnL>
+                    <a:lnR w="9525" cap="flat" cmpd="sng" algn="ctr">
+                      <a:solidFill>
+                        <a:srgbClr val="E5E8EB"/>
+                      </a:solidFill>
+                      <a:prstDash val="solid"/>
+                      <a:round/>
+                      <a:headEnd type="none" w="med" len="med"/>
+                      <a:tailEnd type="none" w="med" len="med"/>
+                    </a:lnR>
+                    <a:lnT w="9525" cap="flat" cmpd="sng" algn="ctr">
+                      <a:solidFill>
+                        <a:srgbClr val="E5E8EB"/>
+                      </a:solidFill>
+                      <a:prstDash val="solid"/>
+                      <a:round/>
+                      <a:headEnd type="none" w="med" len="med"/>
+                      <a:tailEnd type="none" w="med" len="med"/>
+                    </a:lnT>
+                    <a:lnB w="9525" cap="flat" cmpd="sng" algn="ctr">
+                      <a:solidFill>
+                        <a:srgbClr val="E5E8EB"/>
+                      </a:solidFill>
+                      <a:prstDash val="solid"/>
+                      <a:round/>
+                      <a:headEnd type="none" w="med" len="med"/>
+                      <a:tailEnd type="none" w="med" len="med"/>
+                    </a:lnB>
+                  </a:tcPr>
+                </a:tc>
+              </a:tr>
+              <a:tr h="0">
+                <a:tc>
+                  <a:txBody>
+                    <a:bodyPr/>
+                    <a:lstStyle/>
+                    <a:p>
+                      <a:pPr indent="0" marL="0">
+                        <a:buNone/>
+                      </a:pPr>
+                      <a:r>
+                        <a:rPr lang="en-US" sz="1050" dirty="0">
+                          <a:solidFill>
+                            <a:srgbClr val="4E5968"/>
+                          </a:solidFill>
+                          <a:latin typeface="Malgun Gothic" pitchFamily="34" charset="0"/>
+                          <a:ea typeface="Malgun Gothic" pitchFamily="34" charset="-122"/>
+                          <a:cs typeface="Malgun Gothic" pitchFamily="34" charset="-120"/>
+                        </a:rPr>
+                        <a:t>출력 — 답은 글인데 설계사가 원하는 것은 고객 앞에 놓을 지면이다</a:t>
+                      </a:r>
+                      <a:endParaRPr lang="en-US" sz="1050" dirty="0">
+                        <a:latin typeface="Malgun Gothic" charset="0"/>
+                        <a:ea typeface="Malgun Gothic" charset="0"/>
+                        <a:cs typeface="Malgun Gothic" charset="0"/>
+                      </a:endParaRPr>
+                    </a:p>
+                  </a:txBody>
+                  <a:tcPr marL="54864" marR="54864" marT="54864" marB="54864" anchor="ctr">
+                    <a:lnL w="9525" cap="flat" cmpd="sng" algn="ctr">
+                      <a:solidFill>
+                        <a:srgbClr val="E5E8EB"/>
+                      </a:solidFill>
+                      <a:prstDash val="solid"/>
+                      <a:round/>
+                      <a:headEnd type="none" w="med" len="med"/>
+                      <a:tailEnd type="none" w="med" len="med"/>
+                    </a:lnL>
+                    <a:lnR w="9525" cap="flat" cmpd="sng" algn="ctr">
+                      <a:solidFill>
+                        <a:srgbClr val="E5E8EB"/>
+                      </a:solidFill>
+                      <a:prstDash val="solid"/>
+                      <a:round/>
+                      <a:headEnd type="none" w="med" len="med"/>
+                      <a:tailEnd type="none" w="med" len="med"/>
+                    </a:lnR>
+                    <a:lnT w="9525" cap="flat" cmpd="sng" algn="ctr">
+                      <a:solidFill>
+                        <a:srgbClr val="E5E8EB"/>
+                      </a:solidFill>
+                      <a:prstDash val="solid"/>
+                      <a:round/>
+                      <a:headEnd type="none" w="med" len="med"/>
+                      <a:tailEnd type="none" w="med" len="med"/>
+                    </a:lnT>
+                    <a:lnB w="9525" cap="flat" cmpd="sng" algn="ctr">
+                      <a:solidFill>
+                        <a:srgbClr val="E5E8EB"/>
+                      </a:solidFill>
+                      <a:prstDash val="solid"/>
+                      <a:round/>
+                      <a:headEnd type="none" w="med" len="med"/>
+                      <a:tailEnd type="none" w="med" len="med"/>
+                    </a:lnB>
+                  </a:tcPr>
+                </a:tc>
+                <a:tc>
+                  <a:txBody>
+                    <a:bodyPr/>
+                    <a:lstStyle/>
+                    <a:p>
+                      <a:pPr indent="0" marL="0">
+                        <a:buNone/>
+                      </a:pPr>
+                      <a:r>
+                        <a:rPr lang="en-US" sz="1050" dirty="0">
+                          <a:solidFill>
+                            <a:srgbClr val="4E5968"/>
+                          </a:solidFill>
+                          <a:latin typeface="Malgun Gothic" pitchFamily="34" charset="0"/>
+                          <a:ea typeface="Malgun Gothic" pitchFamily="34" charset="-122"/>
+                          <a:cs typeface="Malgun Gothic" pitchFamily="34" charset="-120"/>
+                        </a:rPr>
+                        <a:t>표지 · 1장 요약 · 담보 지도 · 면책감액표를 채우는 지면 조립 틀(넘침 점검 포함)</a:t>
+                      </a:r>
+                      <a:endParaRPr lang="en-US" sz="1050" dirty="0">
+                        <a:latin typeface="Malgun Gothic" charset="0"/>
+                        <a:ea typeface="Malgun Gothic" charset="0"/>
+                        <a:cs typeface="Malgun Gothic" charset="0"/>
+                      </a:endParaRPr>
+                    </a:p>
+                  </a:txBody>
+                  <a:tcPr marL="54864" marR="54864" marT="54864" marB="54864" anchor="ctr">
+                    <a:lnL w="9525" cap="flat" cmpd="sng" algn="ctr">
+                      <a:solidFill>
+                        <a:srgbClr val="E5E8EB"/>
+                      </a:solidFill>
+                      <a:prstDash val="solid"/>
+                      <a:round/>
+                      <a:headEnd type="none" w="med" len="med"/>
+                      <a:tailEnd type="none" w="med" len="med"/>
+                    </a:lnL>
+                    <a:lnR w="9525" cap="flat" cmpd="sng" algn="ctr">
+                      <a:solidFill>
+                        <a:srgbClr val="E5E8EB"/>
+                      </a:solidFill>
+                      <a:prstDash val="solid"/>
+                      <a:round/>
+                      <a:headEnd type="none" w="med" len="med"/>
+                      <a:tailEnd type="none" w="med" len="med"/>
+                    </a:lnR>
+                    <a:lnT w="9525" cap="flat" cmpd="sng" algn="ctr">
+                      <a:solidFill>
+                        <a:srgbClr val="E5E8EB"/>
+                      </a:solidFill>
+                      <a:prstDash val="solid"/>
+                      <a:round/>
+                      <a:headEnd type="none" w="med" len="med"/>
+                      <a:tailEnd type="none" w="med" len="med"/>
+                    </a:lnT>
+                    <a:lnB w="9525" cap="flat" cmpd="sng" algn="ctr">
+                      <a:solidFill>
+                        <a:srgbClr val="E5E8EB"/>
+                      </a:solidFill>
+                      <a:prstDash val="solid"/>
+                      <a:round/>
+                      <a:headEnd type="none" w="med" len="med"/>
+                      <a:tailEnd type="none" w="med" len="med"/>
+                    </a:lnB>
+                  </a:tcPr>
+                </a:tc>
+                <a:tc>
+                  <a:txBody>
+                    <a:bodyPr/>
+                    <a:lstStyle/>
+                    <a:p>
+                      <a:pPr indent="0" marL="0">
+                        <a:buNone/>
+                      </a:pPr>
+                      <a:r>
+                        <a:rPr lang="en-US" sz="1050" dirty="0">
+                          <a:solidFill>
+                            <a:srgbClr val="4E5968"/>
+                          </a:solidFill>
+                          <a:latin typeface="Malgun Gothic" pitchFamily="34" charset="0"/>
+                          <a:ea typeface="Malgun Gothic" pitchFamily="34" charset="-122"/>
+                          <a:cs typeface="Malgun Gothic" pitchFamily="34" charset="-120"/>
+                        </a:rPr>
+                        <a:t>MeAI 가 쓴 문장을 Key Point 상자 자리에 넣어 그대로 20쪽 PDF 로 낸다</a:t>
+                      </a:r>
+                      <a:endParaRPr lang="en-US" sz="1050" dirty="0">
+                        <a:latin typeface="Malgun Gothic" charset="0"/>
+                        <a:ea typeface="Malgun Gothic" charset="0"/>
+                        <a:cs typeface="Malgun Gothic" charset="0"/>
+                      </a:endParaRPr>
+                    </a:p>
+                  </a:txBody>
+                  <a:tcPr marL="54864" marR="54864" marT="54864" marB="54864" anchor="ctr">
+                    <a:lnL w="9525" cap="flat" cmpd="sng" algn="ctr">
+                      <a:solidFill>
+                        <a:srgbClr val="E5E8EB"/>
+                      </a:solidFill>
+                      <a:prstDash val="solid"/>
+                      <a:round/>
+                      <a:headEnd type="none" w="med" len="med"/>
+                      <a:tailEnd type="none" w="med" len="med"/>
+                    </a:lnL>
+                    <a:lnR w="9525" cap="flat" cmpd="sng" algn="ctr">
+                      <a:solidFill>
+                        <a:srgbClr val="E5E8EB"/>
+                      </a:solidFill>
+                      <a:prstDash val="solid"/>
+                      <a:round/>
+                      <a:headEnd type="none" w="med" len="med"/>
+                      <a:tailEnd type="none" w="med" len="med"/>
+                    </a:lnR>
+                    <a:lnT w="9525" cap="flat" cmpd="sng" algn="ctr">
+                      <a:solidFill>
+                        <a:srgbClr val="E5E8EB"/>
+                      </a:solidFill>
+                      <a:prstDash val="solid"/>
+                      <a:round/>
+                      <a:headEnd type="none" w="med" len="med"/>
+                      <a:tailEnd type="none" w="med" len="med"/>
+                    </a:lnT>
+                    <a:lnB w="9525" cap="flat" cmpd="sng" algn="ctr">
+                      <a:solidFill>
+                        <a:srgbClr val="E5E8EB"/>
+                      </a:solidFill>
+                      <a:prstDash val="solid"/>
+                      <a:round/>
+                      <a:headEnd type="none" w="med" len="med"/>
+                      <a:tailEnd type="none" w="med" len="med"/>
+                    </a:lnB>
+                  </a:tcPr>
+                </a:tc>
+              </a:tr>
+              <a:tr h="0">
+                <a:tc>
+                  <a:txBody>
+                    <a:bodyPr/>
+                    <a:lstStyle/>
+                    <a:p>
+                      <a:pPr indent="0" marL="0">
+                        <a:buNone/>
+                      </a:pPr>
+                      <a:r>
+                        <a:rPr lang="en-US" sz="1050" dirty="0">
+                          <a:solidFill>
+                            <a:srgbClr val="4E5968"/>
+                          </a:solidFill>
+                          <a:latin typeface="Malgun Gothic" pitchFamily="34" charset="0"/>
+                          <a:ea typeface="Malgun Gothic" pitchFamily="34" charset="-122"/>
+                          <a:cs typeface="Malgun Gothic" pitchFamily="34" charset="-120"/>
+                        </a:rPr>
+                        <a:t>검증 — 생성된 글이 약관과 맞는지 확인할 장치가 없다</a:t>
+                      </a:r>
+                      <a:endParaRPr lang="en-US" sz="1050" dirty="0">
+                        <a:latin typeface="Malgun Gothic" charset="0"/>
+                        <a:ea typeface="Malgun Gothic" charset="0"/>
+                        <a:cs typeface="Malgun Gothic" charset="0"/>
+                      </a:endParaRPr>
+                    </a:p>
+                  </a:txBody>
+                  <a:tcPr marL="54864" marR="54864" marT="54864" marB="54864" anchor="ctr">
+                    <a:lnL w="9525" cap="flat" cmpd="sng" algn="ctr">
+                      <a:solidFill>
+                        <a:srgbClr val="E5E8EB"/>
+                      </a:solidFill>
+                      <a:prstDash val="solid"/>
+                      <a:round/>
+                      <a:headEnd type="none" w="med" len="med"/>
+                      <a:tailEnd type="none" w="med" len="med"/>
+                    </a:lnL>
+                    <a:lnR w="9525" cap="flat" cmpd="sng" algn="ctr">
+                      <a:solidFill>
+                        <a:srgbClr val="E5E8EB"/>
+                      </a:solidFill>
+                      <a:prstDash val="solid"/>
+                      <a:round/>
+                      <a:headEnd type="none" w="med" len="med"/>
+                      <a:tailEnd type="none" w="med" len="med"/>
+                    </a:lnR>
+                    <a:lnT w="9525" cap="flat" cmpd="sng" algn="ctr">
+                      <a:solidFill>
+                        <a:srgbClr val="E5E8EB"/>
+                      </a:solidFill>
+                      <a:prstDash val="solid"/>
+                      <a:round/>
+                      <a:headEnd type="none" w="med" len="med"/>
+                      <a:tailEnd type="none" w="med" len="med"/>
+                    </a:lnT>
+                    <a:lnB w="9525" cap="flat" cmpd="sng" algn="ctr">
+                      <a:solidFill>
+                        <a:srgbClr val="E5E8EB"/>
+                      </a:solidFill>
+                      <a:prstDash val="solid"/>
+                      <a:round/>
+                      <a:headEnd type="none" w="med" len="med"/>
+                      <a:tailEnd type="none" w="med" len="med"/>
+                    </a:lnB>
+                  </a:tcPr>
+                </a:tc>
+                <a:tc>
+                  <a:txBody>
+                    <a:bodyPr/>
+                    <a:lstStyle/>
+                    <a:p>
+                      <a:pPr indent="0" marL="0">
+                        <a:buNone/>
+                      </a:pPr>
+                      <a:r>
+                        <a:rPr lang="en-US" sz="1050" dirty="0">
+                          <a:solidFill>
+                            <a:srgbClr val="4E5968"/>
+                          </a:solidFill>
+                          <a:latin typeface="Malgun Gothic" pitchFamily="34" charset="0"/>
+                          <a:ea typeface="Malgun Gothic" pitchFamily="34" charset="-122"/>
+                          <a:cs typeface="Malgun Gothic" pitchFamily="34" charset="-120"/>
+                        </a:rPr>
+                        <a:t>「추정하지 않는다」 규칙 · 약관 분류번호 대조 · 회귀 점검(쪽별 글자 비교)</a:t>
+                      </a:r>
+                      <a:endParaRPr lang="en-US" sz="1050" dirty="0">
+                        <a:latin typeface="Malgun Gothic" charset="0"/>
+                        <a:ea typeface="Malgun Gothic" charset="0"/>
+                        <a:cs typeface="Malgun Gothic" charset="0"/>
+                      </a:endParaRPr>
+                    </a:p>
+                  </a:txBody>
+                  <a:tcPr marL="54864" marR="54864" marT="54864" marB="54864" anchor="ctr">
+                    <a:lnL w="9525" cap="flat" cmpd="sng" algn="ctr">
+                      <a:solidFill>
+                        <a:srgbClr val="E5E8EB"/>
+                      </a:solidFill>
+                      <a:prstDash val="solid"/>
+                      <a:round/>
+                      <a:headEnd type="none" w="med" len="med"/>
+                      <a:tailEnd type="none" w="med" len="med"/>
+                    </a:lnL>
+                    <a:lnR w="9525" cap="flat" cmpd="sng" algn="ctr">
+                      <a:solidFill>
+                        <a:srgbClr val="E5E8EB"/>
+                      </a:solidFill>
+                      <a:prstDash val="solid"/>
+                      <a:round/>
+                      <a:headEnd type="none" w="med" len="med"/>
+                      <a:tailEnd type="none" w="med" len="med"/>
+                    </a:lnR>
+                    <a:lnT w="9525" cap="flat" cmpd="sng" algn="ctr">
+                      <a:solidFill>
+                        <a:srgbClr val="E5E8EB"/>
+                      </a:solidFill>
+                      <a:prstDash val="solid"/>
+                      <a:round/>
+                      <a:headEnd type="none" w="med" len="med"/>
+                      <a:tailEnd type="none" w="med" len="med"/>
+                    </a:lnT>
+                    <a:lnB w="9525" cap="flat" cmpd="sng" algn="ctr">
+                      <a:solidFill>
+                        <a:srgbClr val="E5E8EB"/>
+                      </a:solidFill>
+                      <a:prstDash val="solid"/>
+                      <a:round/>
+                      <a:headEnd type="none" w="med" len="med"/>
+                      <a:tailEnd type="none" w="med" len="med"/>
+                    </a:lnB>
+                  </a:tcPr>
+                </a:tc>
+                <a:tc>
+                  <a:txBody>
+                    <a:bodyPr/>
+                    <a:lstStyle/>
+                    <a:p>
+                      <a:pPr indent="0" marL="0">
+                        <a:buNone/>
+                      </a:pPr>
+                      <a:r>
+                        <a:rPr lang="en-US" sz="1050" dirty="0">
+                          <a:solidFill>
+                            <a:srgbClr val="4E5968"/>
+                          </a:solidFill>
+                          <a:latin typeface="Malgun Gothic" pitchFamily="34" charset="0"/>
+                          <a:ea typeface="Malgun Gothic" pitchFamily="34" charset="-122"/>
+                          <a:cs typeface="Malgun Gothic" pitchFamily="34" charset="-120"/>
+                        </a:rPr>
+                        <a:t>MeAI 출력에도 같은 검증을 걸어 틀린 숫자 대신 빈칸과 사유가 나오게 한다</a:t>
+                      </a:r>
+                      <a:endParaRPr lang="en-US" sz="1050" dirty="0">
+                        <a:latin typeface="Malgun Gothic" charset="0"/>
+                        <a:ea typeface="Malgun Gothic" charset="0"/>
+                        <a:cs typeface="Malgun Gothic" charset="0"/>
+                      </a:endParaRPr>
+                    </a:p>
+                  </a:txBody>
+                  <a:tcPr marL="54864" marR="54864" marT="54864" marB="54864" anchor="ctr">
+                    <a:lnL w="9525" cap="flat" cmpd="sng" algn="ctr">
+                      <a:solidFill>
+                        <a:srgbClr val="E5E8EB"/>
+                      </a:solidFill>
+                      <a:prstDash val="solid"/>
+                      <a:round/>
+                      <a:headEnd type="none" w="med" len="med"/>
+                      <a:tailEnd type="none" w="med" len="med"/>
+                    </a:lnL>
+                    <a:lnR w="9525" cap="flat" cmpd="sng" algn="ctr">
+                      <a:solidFill>
+                        <a:srgbClr val="E5E8EB"/>
+                      </a:solidFill>
+                      <a:prstDash val="solid"/>
+                      <a:round/>
+                      <a:headEnd type="none" w="med" len="med"/>
+                      <a:tailEnd type="none" w="med" len="med"/>
+                    </a:lnR>
+                    <a:lnT w="9525" cap="flat" cmpd="sng" algn="ctr">
+                      <a:solidFill>
+                        <a:srgbClr val="E5E8EB"/>
+                      </a:solidFill>
+                      <a:prstDash val="solid"/>
+                      <a:round/>
+                      <a:headEnd type="none" w="med" len="med"/>
+                      <a:tailEnd type="none" w="med" len="med"/>
+                    </a:lnT>
+                    <a:lnB w="9525" cap="flat" cmpd="sng" algn="ctr">
+                      <a:solidFill>
+                        <a:srgbClr val="E5E8EB"/>
+                      </a:solidFill>
+                      <a:prstDash val="solid"/>
+                      <a:round/>
+                      <a:headEnd type="none" w="med" len="med"/>
+                      <a:tailEnd type="none" w="med" len="med"/>
+                    </a:lnB>
+                  </a:tcPr>
+                </a:tc>
+              </a:tr>
+            </a:tbl>
+          </a:graphicData>
+        </a:graphic>
+      </p:graphicFrame>
+      <p:sp>
+        <p:nvSpPr>
+          <p:cNvPr id="5" name="t-130"/>
+          <p:cNvSpPr txBox="1"/>
+          <p:nvPr/>
+        </p:nvSpPr>
+        <p:spPr>
+          <a:xfrm>
+            <a:off x="640080" y="4617720"/>
+            <a:ext cx="3657600" cy="320040"/>
+          </a:xfrm>
+          <a:prstGeom prst="rect">
+            <a:avLst/>
+          </a:prstGeom>
+          <a:noFill/>
+          <a:ln/>
+        </p:spPr>
+        <p:txBody>
+          <a:bodyPr wrap="square" lIns="0" tIns="0" rIns="0" bIns="0" rtlCol="0" anchor="t"/>
+          <a:lstStyle/>
+          <a:p>
+            <a:pPr indent="0" marL="0">
+              <a:buNone/>
+            </a:pPr>
+            <a:r>
+              <a:rPr lang="en-US" sz="1300" b="1" dirty="0">
+                <a:solidFill>
+                  <a:srgbClr val="191F28"/>
+                </a:solidFill>
+              </a:rPr>
+              <a:t>단계 제안</a:t>
+            </a:r>
+            <a:endParaRPr lang="en-US" sz="1300" dirty="0"/>
+          </a:p>
+        </p:txBody>
+      </p:sp>
+      <p:sp>
+        <p:nvSpPr>
+          <p:cNvPr id="6" name="t-131"/>
+          <p:cNvSpPr txBox="1"/>
+          <p:nvPr/>
+        </p:nvSpPr>
+        <p:spPr>
+          <a:xfrm>
+            <a:off x="640080" y="4937760"/>
+            <a:ext cx="10881360" cy="365760"/>
+          </a:xfrm>
+          <a:prstGeom prst="rect">
+            <a:avLst/>
+          </a:prstGeom>
+          <a:noFill/>
+          <a:ln/>
+        </p:spPr>
+        <p:txBody>
+          <a:bodyPr wrap="square" lIns="0" tIns="0" rIns="0" bIns="0" rtlCol="0" anchor="t"/>
+          <a:lstStyle/>
+          <a:p>
+            <a:pPr indent="0" marL="0">
+              <a:buNone/>
+            </a:pPr>
+            <a:r>
+              <a:rPr lang="en-US" sz="1150" dirty="0">
+                <a:solidFill>
+                  <a:srgbClr val="4E5968"/>
+                </a:solidFill>
+              </a:rPr>
+              <a:t>① 지금 : 오프라인 생성기로 현장 검증 — 어떤 쪽 · 어떤 Key Point 가 실제로 쓰이는지 모은다</a:t>
+            </a:r>
+            <a:endParaRPr lang="en-US" sz="1150" dirty="0"/>
+          </a:p>
+        </p:txBody>
+      </p:sp>
+      <p:sp>
+        <p:nvSpPr>
+          <p:cNvPr id="7" name="t-132"/>
+          <p:cNvSpPr txBox="1"/>
+          <p:nvPr/>
+        </p:nvSpPr>
+        <p:spPr>
+          <a:xfrm>
+            <a:off x="640080" y="5321808"/>
+            <a:ext cx="10881360" cy="365760"/>
+          </a:xfrm>
+          <a:prstGeom prst="rect">
+            <a:avLst/>
+          </a:prstGeom>
+          <a:noFill/>
+          <a:ln/>
+        </p:spPr>
+        <p:txBody>
+          <a:bodyPr wrap="square" lIns="0" tIns="0" rIns="0" bIns="0" rtlCol="0" anchor="t"/>
+          <a:lstStyle/>
+          <a:p>
+            <a:pPr indent="0" marL="0">
+              <a:buNone/>
+            </a:pPr>
+            <a:r>
+              <a:rPr lang="en-US" sz="1150" dirty="0">
+                <a:solidFill>
+                  <a:srgbClr val="4E5968"/>
+                </a:solidFill>
+              </a:rPr>
+              <a:t>② 다음 : 특약검색기의 「MeAI 프롬프트 자동 생성」 · 프롬프트 라이브러리와 연결 — 가이드북의 담보 · 분류번호를 프롬프트에 실어 MeAI 에 묻는다</a:t>
+            </a:r>
+            <a:endParaRPr lang="en-US" sz="1150" dirty="0"/>
+          </a:p>
+        </p:txBody>
+      </p:sp>
+      <p:sp>
+        <p:nvSpPr>
+          <p:cNvPr id="8" name="t-133"/>
+          <p:cNvSpPr txBox="1"/>
+          <p:nvPr/>
+        </p:nvSpPr>
+        <p:spPr>
+          <a:xfrm>
+            <a:off x="640080" y="5705856"/>
+            <a:ext cx="10881360" cy="365760"/>
+          </a:xfrm>
+          <a:prstGeom prst="rect">
+            <a:avLst/>
+          </a:prstGeom>
+          <a:noFill/>
+          <a:ln/>
+        </p:spPr>
+        <p:txBody>
+          <a:bodyPr wrap="square" lIns="0" tIns="0" rIns="0" bIns="0" rtlCol="0" anchor="t"/>
+          <a:lstStyle/>
+          <a:p>
+            <a:pPr indent="0" marL="0">
+              <a:buNone/>
+            </a:pPr>
+            <a:r>
+              <a:rPr lang="en-US" sz="1150" dirty="0">
+                <a:solidFill>
+                  <a:srgbClr val="4E5968"/>
+                </a:solidFill>
+              </a:rPr>
+              <a:t>③ 그 뒤 : MeAI 리포트 생성에 특약 마스터와 지면 조립 틀을 연동 — 리포트 생성 기능의 세부는 담당 부서와 맞춘다</a:t>
+            </a:r>
+            <a:endParaRPr lang="en-US" sz="1150" dirty="0"/>
+          </a:p>
+        </p:txBody>
+      </p:sp>
+      <p:sp>
+        <p:nvSpPr>
+          <p:cNvPr id="25" name="Slide Number Placeholder 0"/>
+          <p:cNvSpPr>
+            <a:spLocks noGrp="1"/>
+          </p:cNvSpPr>
+          <p:nvPr>
+            <p:ph type="sldNum" sz="quarter" idx="4294967295"/>
+          </p:nvPr>
+        </p:nvSpPr>
+        <p:spPr>
+          <a:xfrm>
+            <a:off x="10820095" y="6446520"/>
+            <a:ext cx="731520" cy="274320"/>
+          </a:xfrm>
+          <a:prstGeom prst="rect">
+            <a:avLst/>
+          </a:prstGeom>
+          <a:extLst>
+            <a:ext uri="{C572A759-6A51-4108-AA02-DFA0A04FC94B}">
+              <ma14:wrappingTextBoxFlag xmlns:ma14="http://schemas.microsoft.com/office/mac/drawingml/2011/main" val="0"/>
+            </a:ext>
+          </a:extLst>
+        </p:spPr>
+        <p:txBody>
+          <a:bodyPr/>
+          <a:lstStyle>
+            <a:lvl1pPr>
+              <a:defRPr sz="900">
+                <a:solidFill>
+                  <a:srgbClr val="8B95A1"/>
+                </a:solidFill>
+              </a:defRPr>
+            </a:lvl1pPr>
+          </a:lstStyle>
+          <a:p>
+            <a:pPr algn="r"/>
+            <a:fld id="{F7021451-1387-4CA6-816F-3879F97B5CBC}" type="slidenum">
+              <a:rPr b="0" lang="en-US"/>
+              <a:t>13</a:t>
+            </a:fld>
+            <a:endParaRPr lang="en-US"/>
+          </a:p>
+        </p:txBody>
+      </p:sp>
+    </p:spTree>
+  </p:cSld>
+  <p:clrMapOvr>
+    <a:masterClrMapping/>
+  </p:clrMapOvr>
+</p:sld>
+</file>
+
+<file path=ppt/slides/slide14.xml><?xml version="1.0" encoding="utf-8"?>
+<p:sld xmlns:a="http://schemas.openxmlformats.org/drawingml/2006/main" xmlns:r="http://schemas.openxmlformats.org/officeDocument/2006/relationships" xmlns:p="http://schemas.openxmlformats.org/presentationml/2006/main">
+  <p:cSld name="Slide 14">
+    <p:spTree>
+      <p:nvGrpSpPr>
+        <p:cNvPr id="1" name=""/>
+        <p:cNvGrpSpPr/>
+        <p:nvPr/>
+      </p:nvGrpSpPr>
+      <p:grpSpPr>
+        <a:xfrm>
+          <a:off x="0" y="0"/>
+          <a:ext cx="0" cy="0"/>
+          <a:chOff x="0" y="0"/>
+          <a:chExt cx="0" cy="0"/>
+        </a:xfrm>
+      </p:grpSpPr>
+      <p:sp>
+        <p:nvSpPr>
+          <p:cNvPr id="2" name="Text 0"/>
+          <p:cNvSpPr/>
+          <p:nvPr>
+            <p:ph idx="100" type="title" hasCustomPrompt="1"/>
+          </p:nvPr>
+        </p:nvSpPr>
+        <p:spPr>
+          <a:xfrm>
+            <a:off x="640080" y="411480"/>
+            <a:ext cx="10911535" cy="640080"/>
+          </a:xfrm>
+          <a:prstGeom prst="rect">
+            <a:avLst/>
+          </a:prstGeom>
+          <a:noFill/>
+          <a:ln/>
+        </p:spPr>
+        <p:txBody>
+          <a:bodyPr wrap="square" lIns="0" tIns="0" rIns="0" bIns="0" rtlCol="0" anchor="t"/>
+          <a:lstStyle/>
+          <a:p>
+            <a:pPr algn="l" indent="0" marL="0">
+              <a:buNone/>
+            </a:pPr>
+            <a:r>
+              <a:rPr lang="en-US" sz="2400" b="1" dirty="0">
+                <a:solidFill>
+                  <a:srgbClr val="191F28"/>
+                </a:solidFill>
+              </a:rPr>
+              <a:t>12. 자주 묻는 질문</a:t>
+            </a:r>
+            <a:endParaRPr lang="en-US" sz="2400" dirty="0"/>
+          </a:p>
+        </p:txBody>
+      </p:sp>
+      <p:graphicFrame>
+        <p:nvGraphicFramePr>
+          <p:cNvPr id="15" name="tbl-134"/>
           <p:cNvGraphicFramePr>
             <a:graphicFrameLocks noGrp="1"/>
           </p:cNvGraphicFramePr>
@@ -7317,7 +8722,7 @@
             <a:pPr algn="r"/>
             <a:fld id="{F7021451-1387-4CA6-816F-3879F97B5CBC}" type="slidenum">
               <a:rPr b="0" lang="en-US"/>
-              <a:t>13</a:t>
+              <a:t>14</a:t>
             </a:fld>
             <a:endParaRPr lang="en-US"/>
           </a:p>
@@ -7331,9 +8736,9 @@
 </p:sld>
 </file>
 
-<file path=ppt/slides/slide14.xml><?xml version="1.0" encoding="utf-8"?>
+<file path=ppt/slides/slide15.xml><?xml version="1.0" encoding="utf-8"?>
 <p:sld xmlns:a="http://schemas.openxmlformats.org/drawingml/2006/main" xmlns:r="http://schemas.openxmlformats.org/officeDocument/2006/relationships" xmlns:p="http://schemas.openxmlformats.org/presentationml/2006/main">
-  <p:cSld name="Slide 14">
+  <p:cSld name="Slide 15">
     <p:spTree>
       <p:nvGrpSpPr>
         <p:cNvPr id="1" name=""/>
@@ -7380,7 +8785,7 @@
                   <a:srgbClr val="191F28"/>
                 </a:solidFill>
               </a:rPr>
-              <a:t>12. 문의 · 피드백 · 버전</a:t>
+              <a:t>13. 문의 · 피드백 · 버전</a:t>
             </a:r>
             <a:endParaRPr lang="en-US" sz="2400" dirty="0"/>
           </a:p>
@@ -7388,7 +8793,7 @@
       </p:sp>
       <p:sp>
         <p:nvSpPr>
-          <p:cNvPr id="3" name="b-130"/>
+          <p:cNvPr id="3" name="b-135"/>
           <p:cNvSpPr/>
           <p:nvPr/>
         </p:nvSpPr>
@@ -7413,7 +8818,7 @@
       </p:sp>
       <p:sp>
         <p:nvSpPr>
-          <p:cNvPr id="4" name="t-131"/>
+          <p:cNvPr id="4" name="t-136"/>
           <p:cNvSpPr txBox="1"/>
           <p:nvPr/>
         </p:nvSpPr>
@@ -7449,7 +8854,7 @@
       </p:sp>
       <p:sp>
         <p:nvSpPr>
-          <p:cNvPr id="5" name="t-132"/>
+          <p:cNvPr id="5" name="t-137"/>
           <p:cNvSpPr txBox="1"/>
           <p:nvPr/>
         </p:nvSpPr>
@@ -7499,7 +8904,7 @@
       </p:sp>
       <p:sp>
         <p:nvSpPr>
-          <p:cNvPr id="6" name="t-133"/>
+          <p:cNvPr id="6" name="t-138"/>
           <p:cNvSpPr txBox="1"/>
           <p:nvPr/>
         </p:nvSpPr>
@@ -7535,7 +8940,7 @@
       </p:sp>
       <p:sp>
         <p:nvSpPr>
-          <p:cNvPr id="7" name="t-134"/>
+          <p:cNvPr id="7" name="t-139"/>
           <p:cNvSpPr txBox="1"/>
           <p:nvPr/>
         </p:nvSpPr>
@@ -7571,7 +8976,7 @@
       </p:sp>
       <p:sp>
         <p:nvSpPr>
-          <p:cNvPr id="8" name="t-135"/>
+          <p:cNvPr id="8" name="t-140"/>
           <p:cNvSpPr txBox="1"/>
           <p:nvPr/>
         </p:nvSpPr>
@@ -7607,7 +9012,7 @@
       </p:sp>
       <p:sp>
         <p:nvSpPr>
-          <p:cNvPr id="9" name="t-136"/>
+          <p:cNvPr id="9" name="t-141"/>
           <p:cNvSpPr txBox="1"/>
           <p:nvPr/>
         </p:nvSpPr>
@@ -7643,7 +9048,7 @@
       </p:sp>
       <p:sp>
         <p:nvSpPr>
-          <p:cNvPr id="10" name="t-137"/>
+          <p:cNvPr id="10" name="t-142"/>
           <p:cNvSpPr txBox="1"/>
           <p:nvPr/>
         </p:nvSpPr>
@@ -7679,7 +9084,7 @@
       </p:sp>
       <p:graphicFrame>
         <p:nvGraphicFramePr>
-          <p:cNvPr id="15" name="tbl-138"/>
+          <p:cNvPr id="16" name="tbl-143"/>
           <p:cNvGraphicFramePr>
             <a:graphicFrameLocks noGrp="1"/>
           </p:cNvGraphicFramePr>
@@ -8507,7 +9912,7 @@
       </p:graphicFrame>
       <p:sp>
         <p:nvSpPr>
-          <p:cNvPr id="12" name="t-139"/>
+          <p:cNvPr id="12" name="t-144"/>
           <p:cNvSpPr txBox="1"/>
           <p:nvPr/>
         </p:nvSpPr>
@@ -8610,7 +10015,7 @@
             <a:pPr algn="r"/>
             <a:fld id="{F7021451-1387-4CA6-816F-3879F97B5CBC}" type="slidenum">
               <a:rPr b="0" lang="en-US"/>
-              <a:t>14</a:t>
+              <a:t>15</a:t>
             </a:fld>
             <a:endParaRPr lang="en-US"/>
           </a:p>
@@ -8941,7 +10346,7 @@
                   <a:srgbClr val="8B95A1"/>
                 </a:solidFill>
               </a:rPr>
-              <a:t>10 ~ 12쪽</a:t>
+              <a:t>10 ~ 13쪽</a:t>
             </a:r>
             <a:endParaRPr lang="en-US" sz="1150" dirty="0"/>
           </a:p>
@@ -8977,7 +10382,7 @@
                   <a:srgbClr val="4E5968"/>
                 </a:solidFill>
               </a:rPr>
-              <a:t>왜 만들었나 · 무엇을 만들었나 · 지키는 원칙 · 데이터는 어디서 오나</a:t>
+              <a:t>왜 만들었나 · 무엇을 만들었나 · 지키는 원칙 · 데이터는 어디서 오나 · 제언(MeAI 리포트 생성과 잇기)</a:t>
             </a:r>
             <a:endParaRPr lang="en-US" sz="1300" dirty="0"/>
           </a:p>
@@ -9074,7 +10479,7 @@
                   <a:srgbClr val="8B95A1"/>
                 </a:solidFill>
               </a:rPr>
-              <a:t>13 ~ 14쪽</a:t>
+              <a:t>14 ~ 15쪽</a:t>
             </a:r>
             <a:endParaRPr lang="en-US" sz="1150" dirty="0"/>
           </a:p>
